--- a/reports/customer_presentation.pptx
+++ b/reports/customer_presentation.pptx
@@ -4,6 +4,9 @@
   <p:sldMasterIdLst>
     <p:sldMasterId id="2147483648" r:id="rId1"/>
   </p:sldMasterIdLst>
+  <p:notesMasterIdLst>
+    <p:notesMasterId r:id="rId11"/>
+  </p:notesMasterIdLst>
   <p:sldIdLst>
     <p:sldId id="256" r:id="rId2"/>
     <p:sldId id="257" r:id="rId3"/>
@@ -15,10 +18,7 @@
     <p:sldId id="263" r:id="rId9"/>
     <p:sldId id="264" r:id="rId10"/>
   </p:sldIdLst>
-  <p:notesMasterIdLst>
-    <p:notesMasterId r:id="rId11"/>
-  </p:notesMasterIdLst>
-  <p:sldSz cx="9144000" cy="5143500"/>
+  <p:sldSz cx="9144000" cy="5143500" type="screen16x9"/>
   <p:notesSz cx="5143500" cy="9144000"/>
   <p:defaultTextStyle>
     <a:lvl1pPr marL="0" algn="l" defTabSz="914400" rtl="0" eaLnBrk="1" latinLnBrk="0" hangingPunct="1">
@@ -112,6 +112,11 @@
       </a:defRPr>
     </a:lvl9pPr>
   </p:defaultTextStyle>
+  <p:extLst>
+    <p:ext uri="{EFAFB233-063F-42B5-8137-9DF3F51BA10A}">
+      <p15:sldGuideLst xmlns:p15="http://schemas.microsoft.com/office/powerpoint/2012/main"/>
+    </p:ext>
+  </p:extLst>
 </p:presentation>
 </file>
 
@@ -137,234 +142,10 @@
           <a:chExt cx="0" cy="0"/>
         </a:xfrm>
       </p:grpSpPr>
-      <p:sp>
-        <p:nvSpPr>
-          <p:cNvPr id="2" name="Header Placeholder 1"/>
-          <p:cNvSpPr>
-            <a:spLocks noGrp="1"/>
-          </p:cNvSpPr>
-          <p:nvPr>
-            <p:ph type="hdr" sz="quarter"/>
-          </p:nvPr>
-        </p:nvSpPr>
-        <p:spPr>
-          <a:xfrm>
-            <a:off x="0" y="0"/>
-            <a:ext cx="2971800" cy="458788"/>
-          </a:xfrm>
-          <a:prstGeom prst="rect">
-            <a:avLst/>
-          </a:prstGeom>
-        </p:spPr>
-        <p:txBody>
-          <a:bodyPr vert="horz" lIns="91440" tIns="45720" rIns="91440" bIns="45720" rtlCol="0"/>
-          <a:lstStyle>
-            <a:lvl1pPr algn="l">
-              <a:defRPr sz="1200"/>
-            </a:lvl1pPr>
-          </a:lstStyle>
-          <a:p>
-            <a:endParaRPr lang="en-US"/>
-          </a:p>
-        </p:txBody>
-      </p:sp>
-      <p:sp>
-        <p:nvSpPr>
-          <p:cNvPr id="3" name="Date Placeholder 2"/>
-          <p:cNvSpPr>
-            <a:spLocks noGrp="1"/>
-          </p:cNvSpPr>
-          <p:nvPr>
-            <p:ph type="dt" idx="1"/>
-          </p:nvPr>
-        </p:nvSpPr>
-        <p:spPr>
-          <a:xfrm>
-            <a:off x="3884613" y="0"/>
-            <a:ext cx="2971800" cy="458788"/>
-          </a:xfrm>
-          <a:prstGeom prst="rect">
-            <a:avLst/>
-          </a:prstGeom>
-        </p:spPr>
-        <p:txBody>
-          <a:bodyPr vert="horz" lIns="91440" tIns="45720" rIns="91440" bIns="45720" rtlCol="0"/>
-          <a:lstStyle>
-            <a:lvl1pPr algn="r">
-              <a:defRPr sz="1200"/>
-            </a:lvl1pPr>
-          </a:lstStyle>
-          <a:p>
-            <a:fld id="{5282F153-3F37-0F45-9E97-73ACFA13230C}" type="datetimeFigureOut">
-              <a:rPr lang="en-US"/>
-              <a:t>7/23/19</a:t>
-            </a:fld>
-            <a:endParaRPr lang="en-US"/>
-          </a:p>
-        </p:txBody>
-      </p:sp>
-      <p:sp>
-        <p:nvSpPr>
-          <p:cNvPr id="4" name="Slide Image Placeholder 3"/>
-          <p:cNvSpPr>
-            <a:spLocks noGrp="1" noRot="1" noChangeAspect="1"/>
-          </p:cNvSpPr>
-          <p:nvPr>
-            <p:ph type="sldImg" idx="2"/>
-          </p:nvPr>
-        </p:nvSpPr>
-        <p:spPr>
-          <a:xfrm>
-            <a:off x="685800" y="1143000"/>
-            <a:ext cx="5486400" cy="3086100"/>
-          </a:xfrm>
-          <a:prstGeom prst="rect">
-            <a:avLst/>
-          </a:prstGeom>
-          <a:noFill/>
-          <a:ln w="12700">
-            <a:solidFill>
-              <a:prstClr val="black"/>
-            </a:solidFill>
-          </a:ln>
-        </p:spPr>
-        <p:txBody>
-          <a:bodyPr vert="horz" lIns="91440" tIns="45720" rIns="91440" bIns="45720" rtlCol="0" anchor="ctr"/>
-          <a:lstStyle/>
-          <a:p>
-            <a:endParaRPr lang="en-US"/>
-          </a:p>
-        </p:txBody>
-      </p:sp>
-      <p:sp>
-        <p:nvSpPr>
-          <p:cNvPr id="5" name="Notes Placeholder 4"/>
-          <p:cNvSpPr>
-            <a:spLocks noGrp="1"/>
-          </p:cNvSpPr>
-          <p:nvPr>
-            <p:ph type="body" sz="quarter" idx="3"/>
-          </p:nvPr>
-        </p:nvSpPr>
-        <p:spPr>
-          <a:xfrm>
-            <a:off x="685800" y="4400550"/>
-            <a:ext cx="5486400" cy="3600450"/>
-          </a:xfrm>
-          <a:prstGeom prst="rect">
-            <a:avLst/>
-          </a:prstGeom>
-        </p:spPr>
-        <p:txBody>
-          <a:bodyPr vert="horz" lIns="91440" tIns="45720" rIns="91440" bIns="45720" rtlCol="0"/>
-          <a:lstStyle/>
-          <a:p>
-            <a:pPr lvl="0"/>
-            <a:r>
-              <a:rPr lang="en-US"/>
-              <a:t>Click to edit Master text styles</a:t>
-            </a:r>
-          </a:p>
-          <a:p>
-            <a:pPr lvl="1"/>
-            <a:r>
-              <a:rPr lang="en-US"/>
-              <a:t>Second level</a:t>
-            </a:r>
-          </a:p>
-          <a:p>
-            <a:pPr lvl="2"/>
-            <a:r>
-              <a:rPr lang="en-US"/>
-              <a:t>Third level</a:t>
-            </a:r>
-          </a:p>
-          <a:p>
-            <a:pPr lvl="3"/>
-            <a:r>
-              <a:rPr lang="en-US"/>
-              <a:t>Fourth level</a:t>
-            </a:r>
-          </a:p>
-          <a:p>
-            <a:pPr lvl="4"/>
-            <a:r>
-              <a:rPr lang="en-US"/>
-              <a:t>Fifth level</a:t>
-            </a:r>
-          </a:p>
-        </p:txBody>
-      </p:sp>
-      <p:sp>
-        <p:nvSpPr>
-          <p:cNvPr id="6" name="Footer Placeholder 5"/>
-          <p:cNvSpPr>
-            <a:spLocks noGrp="1"/>
-          </p:cNvSpPr>
-          <p:nvPr>
-            <p:ph type="ftr" sz="quarter" idx="4"/>
-          </p:nvPr>
-        </p:nvSpPr>
-        <p:spPr>
-          <a:xfrm>
-            <a:off x="0" y="8685213"/>
-            <a:ext cx="2971800" cy="458787"/>
-          </a:xfrm>
-          <a:prstGeom prst="rect">
-            <a:avLst/>
-          </a:prstGeom>
-        </p:spPr>
-        <p:txBody>
-          <a:bodyPr vert="horz" lIns="91440" tIns="45720" rIns="91440" bIns="45720" rtlCol="0" anchor="b"/>
-          <a:lstStyle>
-            <a:lvl1pPr algn="l">
-              <a:defRPr sz="1200"/>
-            </a:lvl1pPr>
-          </a:lstStyle>
-          <a:p>
-            <a:endParaRPr lang="en-US"/>
-          </a:p>
-        </p:txBody>
-      </p:sp>
-      <p:sp>
-        <p:nvSpPr>
-          <p:cNvPr id="7" name="Slide Number Placeholder 6"/>
-          <p:cNvSpPr>
-            <a:spLocks noGrp="1"/>
-          </p:cNvSpPr>
-          <p:nvPr>
-            <p:ph type="sldNum" sz="quarter" idx="5"/>
-          </p:nvPr>
-        </p:nvSpPr>
-        <p:spPr>
-          <a:xfrm>
-            <a:off x="3884613" y="8685213"/>
-            <a:ext cx="2971800" cy="458787"/>
-          </a:xfrm>
-          <a:prstGeom prst="rect">
-            <a:avLst/>
-          </a:prstGeom>
-        </p:spPr>
-        <p:txBody>
-          <a:bodyPr vert="horz" lIns="91440" tIns="45720" rIns="91440" bIns="45720" rtlCol="0" anchor="b"/>
-          <a:lstStyle>
-            <a:lvl1pPr algn="r">
-              <a:defRPr sz="1200"/>
-            </a:lvl1pPr>
-          </a:lstStyle>
-          <a:p>
-            <a:fld id="{CE5E9CC1-C706-0F49-92D6-E571CC5EEA8F}" type="slidenum">
-              <a:rPr lang="en-US"/>
-              <a:t>‹#›</a:t>
-            </a:fld>
-            <a:endParaRPr lang="en-US"/>
-          </a:p>
-        </p:txBody>
-      </p:sp>
     </p:spTree>
     <p:extLst>
       <p:ext uri="{BB962C8B-B14F-4D97-AF65-F5344CB8AC3E}">
-        <p14:creationId xmlns:p14="http://schemas.microsoft.com/office/powerpoint/2010/main" val="1024086991"/>
+        <p14:creationId xmlns:p14="http://schemas.microsoft.com/office/powerpoint/2010/main" val="2605975086"/>
       </p:ext>
     </p:extLst>
   </p:cSld>
@@ -508,10 +289,6 @@
           <a:bodyPr/>
           <a:lstStyle/>
           <a:p>
-            <a:r>
-              <a:rPr lang="en-US" dirty="0"/>
-              <a:t/>
-            </a:r>
             <a:endParaRPr lang="en-US" dirty="0"/>
           </a:p>
         </p:txBody>
@@ -596,10 +373,6 @@
           <a:bodyPr/>
           <a:lstStyle/>
           <a:p>
-            <a:r>
-              <a:rPr lang="en-US" dirty="0"/>
-              <a:t/>
-            </a:r>
             <a:endParaRPr lang="en-US" dirty="0"/>
           </a:p>
         </p:txBody>
@@ -684,10 +457,6 @@
           <a:bodyPr/>
           <a:lstStyle/>
           <a:p>
-            <a:r>
-              <a:rPr lang="en-US" dirty="0"/>
-              <a:t/>
-            </a:r>
             <a:endParaRPr lang="en-US" dirty="0"/>
           </a:p>
         </p:txBody>
@@ -772,10 +541,6 @@
           <a:bodyPr/>
           <a:lstStyle/>
           <a:p>
-            <a:r>
-              <a:rPr lang="en-US" dirty="0"/>
-              <a:t/>
-            </a:r>
             <a:endParaRPr lang="en-US" dirty="0"/>
           </a:p>
         </p:txBody>
@@ -860,10 +625,6 @@
           <a:bodyPr/>
           <a:lstStyle/>
           <a:p>
-            <a:r>
-              <a:rPr lang="en-US" dirty="0"/>
-              <a:t/>
-            </a:r>
             <a:endParaRPr lang="en-US" dirty="0"/>
           </a:p>
         </p:txBody>
@@ -948,10 +709,6 @@
           <a:bodyPr/>
           <a:lstStyle/>
           <a:p>
-            <a:r>
-              <a:rPr lang="en-US" dirty="0"/>
-              <a:t/>
-            </a:r>
             <a:endParaRPr lang="en-US" dirty="0"/>
           </a:p>
         </p:txBody>
@@ -1036,10 +793,6 @@
           <a:bodyPr/>
           <a:lstStyle/>
           <a:p>
-            <a:r>
-              <a:rPr lang="en-US" dirty="0"/>
-              <a:t/>
-            </a:r>
             <a:endParaRPr lang="en-US" dirty="0"/>
           </a:p>
         </p:txBody>
@@ -1124,10 +877,6 @@
           <a:bodyPr/>
           <a:lstStyle/>
           <a:p>
-            <a:r>
-              <a:rPr lang="en-US" dirty="0"/>
-              <a:t/>
-            </a:r>
             <a:endParaRPr lang="en-US" dirty="0"/>
           </a:p>
         </p:txBody>
@@ -1212,10 +961,6 @@
           <a:bodyPr/>
           <a:lstStyle/>
           <a:p>
-            <a:r>
-              <a:rPr lang="en-US" dirty="0"/>
-              <a:t/>
-            </a:r>
             <a:endParaRPr lang="en-US" dirty="0"/>
           </a:p>
         </p:txBody>
@@ -1289,6 +1034,11 @@
 <file path=ppt/slideMasters/slideMaster1.xml><?xml version="1.0" encoding="utf-8"?>
 <p:sldMaster xmlns:a="http://schemas.openxmlformats.org/drawingml/2006/main" xmlns:r="http://schemas.openxmlformats.org/officeDocument/2006/relationships" xmlns:p="http://schemas.openxmlformats.org/presentationml/2006/main">
   <p:cSld>
+    <p:bg>
+      <p:bgRef idx="1001">
+        <a:schemeClr val="bg1"/>
+      </p:bgRef>
+    </p:bg>
     <p:spTree>
       <p:nvGrpSpPr>
         <p:cNvPr id="1" name=""/>
@@ -1571,6 +1321,7 @@
         <a:solidFill>
           <a:srgbClr val="FAF9F6"/>
         </a:solidFill>
+        <a:effectLst/>
       </p:bgPr>
     </p:bg>
     <p:spTree>
@@ -1716,11 +1467,11 @@
           <a:bodyPr wrap="square" lIns="0" tIns="0" rIns="0" bIns="0" rtlCol="0" anchor="ctr"/>
           <a:lstStyle/>
           <a:p>
-            <a:pPr indent="0" marL="0">
-              <a:buNone/>
-            </a:pPr>
-            <a:r>
-              <a:rPr lang="en-US" sz="900" b="1" spc="400" kern="0" dirty="0">
+            <a:pPr marL="0" indent="0">
+              <a:buNone/>
+            </a:pPr>
+            <a:r>
+              <a:rPr lang="en-US" sz="900" b="1" kern="0" spc="400" dirty="0">
                 <a:solidFill>
                   <a:srgbClr val="B85042"/>
                 </a:solidFill>
@@ -1755,7 +1506,7 @@
           <a:bodyPr wrap="square" rtlCol="0" anchor="ctr"/>
           <a:lstStyle/>
           <a:p>
-            <a:pPr algn="l" indent="0" marL="0">
+            <a:pPr marL="0" indent="0" algn="l">
               <a:lnSpc>
                 <a:spcPct val="110000"/>
               </a:lnSpc>
@@ -1775,7 +1526,7 @@
             <a:endParaRPr lang="en-US" sz="3800" dirty="0"/>
           </a:p>
           <a:p>
-            <a:pPr algn="l" indent="0" marL="0">
+            <a:pPr marL="0" indent="0" algn="l">
               <a:lnSpc>
                 <a:spcPct val="110000"/>
               </a:lnSpc>
@@ -1795,7 +1546,7 @@
             <a:endParaRPr lang="en-US" sz="3800" dirty="0"/>
           </a:p>
           <a:p>
-            <a:pPr algn="l" indent="0" marL="0">
+            <a:pPr marL="0" indent="0" algn="l">
               <a:lnSpc>
                 <a:spcPct val="110000"/>
               </a:lnSpc>
@@ -1887,7 +1638,7 @@
           <a:bodyPr wrap="square" rtlCol="0" anchor="ctr"/>
           <a:lstStyle/>
           <a:p>
-            <a:pPr algn="l" indent="0" marL="0">
+            <a:pPr marL="0" indent="0" algn="l">
               <a:buNone/>
             </a:pPr>
             <a:r>
@@ -1904,7 +1655,7 @@
             <a:endParaRPr lang="en-US" sz="1200" dirty="0"/>
           </a:p>
           <a:p>
-            <a:pPr algn="l" indent="0" marL="0">
+            <a:pPr marL="0" indent="0" algn="l">
               <a:buNone/>
             </a:pPr>
             <a:r>
@@ -1943,11 +1694,11 @@
           <a:bodyPr wrap="square" lIns="0" tIns="0" rIns="0" bIns="0" rtlCol="0" anchor="ctr"/>
           <a:lstStyle/>
           <a:p>
-            <a:pPr algn="ctr" indent="0" marL="0">
-              <a:buNone/>
-            </a:pPr>
-            <a:r>
-              <a:rPr lang="en-US" sz="1100" b="1" spc="600" kern="0" dirty="0">
+            <a:pPr marL="0" indent="0" algn="ctr">
+              <a:buNone/>
+            </a:pPr>
+            <a:r>
+              <a:rPr lang="en-US" sz="1100" b="1" kern="0" spc="600" dirty="0">
                 <a:solidFill>
                   <a:srgbClr val="FFFFFF"/>
                 </a:solidFill>
@@ -1982,7 +1733,7 @@
           <a:bodyPr wrap="square" rtlCol="0" anchor="ctr"/>
           <a:lstStyle/>
           <a:p>
-            <a:pPr algn="ctr" indent="0" marL="0">
+            <a:pPr marL="0" indent="0" algn="ctr">
               <a:buNone/>
             </a:pPr>
             <a:r>
@@ -1999,7 +1750,7 @@
             <a:endParaRPr lang="en-US" sz="2800" dirty="0"/>
           </a:p>
           <a:p>
-            <a:pPr algn="ctr" indent="0" marL="0">
+            <a:pPr marL="0" indent="0" algn="ctr">
               <a:buNone/>
             </a:pPr>
             <a:r>
@@ -2016,7 +1767,7 @@
             <a:endParaRPr lang="en-US" sz="2800" dirty="0"/>
           </a:p>
           <a:p>
-            <a:pPr algn="ctr" indent="0" marL="0">
+            <a:pPr marL="0" indent="0" algn="ctr">
               <a:buNone/>
             </a:pPr>
             <a:r>
@@ -2050,6 +1801,7 @@
         <a:solidFill>
           <a:srgbClr val="2C2C2C"/>
         </a:solidFill>
+        <a:effectLst/>
       </p:bgPr>
     </p:bg>
     <p:spTree>
@@ -2112,7 +1864,7 @@
           <a:bodyPr wrap="square" lIns="0" tIns="0" rIns="0" bIns="0" rtlCol="0" anchor="ctr"/>
           <a:lstStyle/>
           <a:p>
-            <a:pPr algn="l" indent="0" marL="0">
+            <a:pPr marL="0" indent="0" algn="l">
               <a:buNone/>
             </a:pPr>
             <a:r>
@@ -2151,7 +1903,7 @@
           <a:bodyPr wrap="square" rtlCol="0" anchor="ctr"/>
           <a:lstStyle/>
           <a:p>
-            <a:pPr algn="l" indent="0" marL="0">
+            <a:pPr marL="0" indent="0" algn="l">
               <a:buNone/>
             </a:pPr>
             <a:r>
@@ -2168,7 +1920,7 @@
             <a:endParaRPr lang="en-US" sz="3000" dirty="0"/>
           </a:p>
           <a:p>
-            <a:pPr algn="l" indent="0" marL="0">
+            <a:pPr marL="0" indent="0" algn="l">
               <a:buNone/>
             </a:pPr>
             <a:r>
@@ -2235,7 +1987,7 @@
             <a:prstDash val="solid"/>
           </a:ln>
           <a:effectLst>
-            <a:outerShdw sx="100000" sy="100000" kx="0" ky="0" algn="bl" rotWithShape="0" blurRad="127000" dist="50800" dir="8100000">
+            <a:outerShdw blurRad="127000" dist="50800" dir="8100000" algn="bl" rotWithShape="0">
               <a:srgbClr val="000000">
                 <a:alpha val="10000"/>
               </a:srgbClr>
@@ -2289,7 +2041,7 @@
           <a:bodyPr wrap="square" lIns="0" tIns="0" rIns="0" bIns="0" rtlCol="0" anchor="ctr"/>
           <a:lstStyle/>
           <a:p>
-            <a:pPr algn="l" indent="0" marL="0">
+            <a:pPr marL="0" indent="0" algn="l">
               <a:buNone/>
             </a:pPr>
             <a:r>
@@ -2325,7 +2077,7 @@
           <a:bodyPr wrap="square" lIns="0" tIns="0" rIns="0" bIns="0" rtlCol="0" anchor="ctr"/>
           <a:lstStyle/>
           <a:p>
-            <a:pPr algn="l" indent="0" marL="0">
+            <a:pPr marL="0" indent="0" algn="l">
               <a:buNone/>
             </a:pPr>
             <a:r>
@@ -2364,7 +2116,7 @@
           <a:bodyPr wrap="square" lIns="0" tIns="0" rIns="0" bIns="0" rtlCol="0" anchor="ctr"/>
           <a:lstStyle/>
           <a:p>
-            <a:pPr algn="l" indent="0" marL="0">
+            <a:pPr marL="0" indent="0" algn="l">
               <a:buNone/>
             </a:pPr>
             <a:r>
@@ -2406,7 +2158,7 @@
             <a:prstDash val="solid"/>
           </a:ln>
           <a:effectLst>
-            <a:outerShdw sx="100000" sy="100000" kx="0" ky="0" algn="bl" rotWithShape="0" blurRad="127000" dist="50800" dir="8100000">
+            <a:outerShdw blurRad="127000" dist="50800" dir="8100000" algn="bl" rotWithShape="0">
               <a:srgbClr val="000000">
                 <a:alpha val="10000"/>
               </a:srgbClr>
@@ -2460,7 +2212,7 @@
           <a:bodyPr wrap="square" lIns="0" tIns="0" rIns="0" bIns="0" rtlCol="0" anchor="ctr"/>
           <a:lstStyle/>
           <a:p>
-            <a:pPr algn="l" indent="0" marL="0">
+            <a:pPr marL="0" indent="0" algn="l">
               <a:buNone/>
             </a:pPr>
             <a:r>
@@ -2496,7 +2248,7 @@
           <a:bodyPr wrap="square" lIns="0" tIns="0" rIns="0" bIns="0" rtlCol="0" anchor="ctr"/>
           <a:lstStyle/>
           <a:p>
-            <a:pPr algn="l" indent="0" marL="0">
+            <a:pPr marL="0" indent="0" algn="l">
               <a:buNone/>
             </a:pPr>
             <a:r>
@@ -2535,7 +2287,7 @@
           <a:bodyPr wrap="square" lIns="0" tIns="0" rIns="0" bIns="0" rtlCol="0" anchor="ctr"/>
           <a:lstStyle/>
           <a:p>
-            <a:pPr algn="l" indent="0" marL="0">
+            <a:pPr marL="0" indent="0" algn="l">
               <a:buNone/>
             </a:pPr>
             <a:r>
@@ -2577,7 +2329,7 @@
             <a:prstDash val="solid"/>
           </a:ln>
           <a:effectLst>
-            <a:outerShdw sx="100000" sy="100000" kx="0" ky="0" algn="bl" rotWithShape="0" blurRad="127000" dist="50800" dir="8100000">
+            <a:outerShdw blurRad="127000" dist="50800" dir="8100000" algn="bl" rotWithShape="0">
               <a:srgbClr val="000000">
                 <a:alpha val="10000"/>
               </a:srgbClr>
@@ -2631,7 +2383,7 @@
           <a:bodyPr wrap="square" lIns="0" tIns="0" rIns="0" bIns="0" rtlCol="0" anchor="ctr"/>
           <a:lstStyle/>
           <a:p>
-            <a:pPr algn="l" indent="0" marL="0">
+            <a:pPr marL="0" indent="0" algn="l">
               <a:buNone/>
             </a:pPr>
             <a:r>
@@ -2667,7 +2419,7 @@
           <a:bodyPr wrap="square" lIns="0" tIns="0" rIns="0" bIns="0" rtlCol="0" anchor="ctr"/>
           <a:lstStyle/>
           <a:p>
-            <a:pPr algn="l" indent="0" marL="0">
+            <a:pPr marL="0" indent="0" algn="l">
               <a:buNone/>
             </a:pPr>
             <a:r>
@@ -2706,7 +2458,7 @@
           <a:bodyPr wrap="square" lIns="0" tIns="0" rIns="0" bIns="0" rtlCol="0" anchor="ctr"/>
           <a:lstStyle/>
           <a:p>
-            <a:pPr algn="l" indent="0" marL="0">
+            <a:pPr marL="0" indent="0" algn="l">
               <a:buNone/>
             </a:pPr>
             <a:r>
@@ -2740,6 +2492,7 @@
         <a:solidFill>
           <a:srgbClr val="FAF9F6"/>
         </a:solidFill>
+        <a:effectLst/>
       </p:bgPr>
     </p:bg>
     <p:spTree>
@@ -2827,7 +2580,7 @@
           <a:bodyPr wrap="square" lIns="0" tIns="0" rIns="0" bIns="0" rtlCol="0" anchor="ctr"/>
           <a:lstStyle/>
           <a:p>
-            <a:pPr algn="ctr" indent="0" marL="0">
+            <a:pPr marL="0" indent="0" algn="ctr">
               <a:buNone/>
             </a:pPr>
             <a:r>
@@ -2866,7 +2619,7 @@
           <a:bodyPr wrap="square" rtlCol="0" anchor="ctr"/>
           <a:lstStyle/>
           <a:p>
-            <a:pPr algn="ctr" indent="0" marL="0">
+            <a:pPr marL="0" indent="0" algn="ctr">
               <a:buNone/>
             </a:pPr>
             <a:r>
@@ -2883,7 +2636,7 @@
             <a:endParaRPr lang="en-US" sz="2200" dirty="0"/>
           </a:p>
           <a:p>
-            <a:pPr algn="ctr" indent="0" marL="0">
+            <a:pPr marL="0" indent="0" algn="ctr">
               <a:buNone/>
             </a:pPr>
             <a:r>
@@ -2922,7 +2675,7 @@
           <a:bodyPr wrap="square" rtlCol="0" anchor="ctr"/>
           <a:lstStyle/>
           <a:p>
-            <a:pPr algn="ctr" indent="0" marL="0">
+            <a:pPr marL="0" indent="0" algn="ctr">
               <a:buNone/>
             </a:pPr>
             <a:r>
@@ -3011,7 +2764,7 @@
           <a:bodyPr wrap="square" lIns="0" tIns="0" rIns="0" bIns="0" rtlCol="0" anchor="ctr"/>
           <a:lstStyle/>
           <a:p>
-            <a:pPr algn="l" indent="0" marL="0">
+            <a:pPr marL="0" indent="0" algn="l">
               <a:buNone/>
             </a:pPr>
             <a:r>
@@ -3050,7 +2803,7 @@
           <a:bodyPr wrap="square" lIns="0" tIns="0" rIns="0" bIns="0" rtlCol="0" anchor="ctr"/>
           <a:lstStyle/>
           <a:p>
-            <a:pPr algn="l" indent="0" marL="0">
+            <a:pPr marL="0" indent="0" algn="l">
               <a:buNone/>
             </a:pPr>
             <a:r>
@@ -3089,7 +2842,7 @@
           <a:bodyPr wrap="square" lIns="0" tIns="0" rIns="0" bIns="0" rtlCol="0" anchor="ctr"/>
           <a:lstStyle/>
           <a:p>
-            <a:pPr algn="l" indent="0" marL="0">
+            <a:pPr marL="0" indent="0" algn="l">
               <a:buNone/>
             </a:pPr>
             <a:r>
@@ -3178,7 +2931,7 @@
           <a:bodyPr wrap="square" lIns="0" tIns="0" rIns="0" bIns="0" rtlCol="0" anchor="ctr"/>
           <a:lstStyle/>
           <a:p>
-            <a:pPr algn="l" indent="0" marL="0">
+            <a:pPr marL="0" indent="0" algn="l">
               <a:buNone/>
             </a:pPr>
             <a:r>
@@ -3217,7 +2970,7 @@
           <a:bodyPr wrap="square" lIns="0" tIns="0" rIns="0" bIns="0" rtlCol="0" anchor="ctr"/>
           <a:lstStyle/>
           <a:p>
-            <a:pPr algn="l" indent="0" marL="0">
+            <a:pPr marL="0" indent="0" algn="l">
               <a:buNone/>
             </a:pPr>
             <a:r>
@@ -3256,7 +3009,7 @@
           <a:bodyPr wrap="square" lIns="0" tIns="0" rIns="0" bIns="0" rtlCol="0" anchor="ctr"/>
           <a:lstStyle/>
           <a:p>
-            <a:pPr algn="l" indent="0" marL="0">
+            <a:pPr marL="0" indent="0" algn="l">
               <a:buNone/>
             </a:pPr>
             <a:r>
@@ -3345,7 +3098,7 @@
           <a:bodyPr wrap="square" lIns="0" tIns="0" rIns="0" bIns="0" rtlCol="0" anchor="ctr"/>
           <a:lstStyle/>
           <a:p>
-            <a:pPr algn="l" indent="0" marL="0">
+            <a:pPr marL="0" indent="0" algn="l">
               <a:buNone/>
             </a:pPr>
             <a:r>
@@ -3384,7 +3137,7 @@
           <a:bodyPr wrap="square" lIns="0" tIns="0" rIns="0" bIns="0" rtlCol="0" anchor="ctr"/>
           <a:lstStyle/>
           <a:p>
-            <a:pPr algn="l" indent="0" marL="0">
+            <a:pPr marL="0" indent="0" algn="l">
               <a:buNone/>
             </a:pPr>
             <a:r>
@@ -3423,7 +3176,7 @@
           <a:bodyPr wrap="square" lIns="0" tIns="0" rIns="0" bIns="0" rtlCol="0" anchor="ctr"/>
           <a:lstStyle/>
           <a:p>
-            <a:pPr algn="l" indent="0" marL="0">
+            <a:pPr marL="0" indent="0" algn="l">
               <a:buNone/>
             </a:pPr>
             <a:r>
@@ -3512,7 +3265,7 @@
           <a:bodyPr wrap="square" lIns="0" tIns="0" rIns="0" bIns="0" rtlCol="0" anchor="ctr"/>
           <a:lstStyle/>
           <a:p>
-            <a:pPr algn="l" indent="0" marL="0">
+            <a:pPr marL="0" indent="0" algn="l">
               <a:buNone/>
             </a:pPr>
             <a:r>
@@ -3551,7 +3304,7 @@
           <a:bodyPr wrap="square" lIns="0" tIns="0" rIns="0" bIns="0" rtlCol="0" anchor="ctr"/>
           <a:lstStyle/>
           <a:p>
-            <a:pPr algn="l" indent="0" marL="0">
+            <a:pPr marL="0" indent="0" algn="l">
               <a:buNone/>
             </a:pPr>
             <a:r>
@@ -3590,7 +3343,7 @@
           <a:bodyPr wrap="square" lIns="0" tIns="0" rIns="0" bIns="0" rtlCol="0" anchor="ctr"/>
           <a:lstStyle/>
           <a:p>
-            <a:pPr algn="l" indent="0" marL="0">
+            <a:pPr marL="0" indent="0" algn="l">
               <a:buNone/>
             </a:pPr>
             <a:r>
@@ -3654,7 +3407,7 @@
           <a:bodyPr wrap="square" lIns="0" tIns="0" rIns="0" bIns="0" rtlCol="0" anchor="ctr"/>
           <a:lstStyle/>
           <a:p>
-            <a:pPr algn="l" indent="0" marL="0">
+            <a:pPr marL="0" indent="0" algn="l">
               <a:buNone/>
             </a:pPr>
             <a:r>
@@ -3693,7 +3446,7 @@
           <a:bodyPr wrap="square" lIns="0" tIns="0" rIns="0" bIns="0" rtlCol="0" anchor="ctr"/>
           <a:lstStyle/>
           <a:p>
-            <a:pPr algn="l" indent="0" marL="0">
+            <a:pPr marL="0" indent="0" algn="l">
               <a:buNone/>
             </a:pPr>
             <a:r>
@@ -3732,7 +3485,7 @@
           <a:bodyPr wrap="square" lIns="0" tIns="0" rIns="0" bIns="0" rtlCol="0" anchor="ctr"/>
           <a:lstStyle/>
           <a:p>
-            <a:pPr algn="l" indent="0" marL="0">
+            <a:pPr marL="0" indent="0" algn="l">
               <a:buNone/>
             </a:pPr>
             <a:r>
@@ -3766,6 +3519,7 @@
         <a:solidFill>
           <a:srgbClr val="E7E8D1"/>
         </a:solidFill>
+        <a:effectLst/>
       </p:bgPr>
     </p:bg>
     <p:spTree>
@@ -3803,7 +3557,7 @@
           <a:bodyPr wrap="square" lIns="0" tIns="0" rIns="0" bIns="0" rtlCol="0" anchor="ctr"/>
           <a:lstStyle/>
           <a:p>
-            <a:pPr algn="l" indent="0" marL="0">
+            <a:pPr marL="0" indent="0" algn="l">
               <a:buNone/>
             </a:pPr>
             <a:r>
@@ -3844,7 +3598,7 @@
           <a:bodyPr wrap="square" lIns="0" tIns="0" rIns="0" bIns="0" rtlCol="0" anchor="ctr"/>
           <a:lstStyle/>
           <a:p>
-            <a:pPr algn="l" indent="0" marL="0">
+            <a:pPr marL="0" indent="0" algn="l">
               <a:buNone/>
             </a:pPr>
             <a:r>
@@ -3908,7 +3662,7 @@
           <a:bodyPr wrap="square" rtlCol="0" anchor="ctr"/>
           <a:lstStyle/>
           <a:p>
-            <a:pPr indent="0" marL="0">
+            <a:pPr marL="0" indent="0">
               <a:buNone/>
             </a:pPr>
             <a:r>
@@ -3950,7 +3704,7 @@
             <a:prstDash val="solid"/>
           </a:ln>
           <a:effectLst>
-            <a:outerShdw sx="100000" sy="100000" kx="0" ky="0" algn="bl" rotWithShape="0" blurRad="127000" dist="50800" dir="8100000">
+            <a:outerShdw blurRad="127000" dist="50800" dir="8100000" algn="bl" rotWithShape="0">
               <a:srgbClr val="000000">
                 <a:alpha val="10000"/>
               </a:srgbClr>
@@ -3979,7 +3733,7 @@
           <a:bodyPr wrap="square" lIns="0" tIns="0" rIns="0" bIns="0" rtlCol="0" anchor="ctr"/>
           <a:lstStyle/>
           <a:p>
-            <a:pPr algn="l" indent="0" marL="0">
+            <a:pPr marL="0" indent="0" algn="l">
               <a:buNone/>
             </a:pPr>
             <a:r>
@@ -4018,7 +3772,7 @@
           <a:bodyPr wrap="square" lIns="0" tIns="0" rIns="0" bIns="0" rtlCol="0" anchor="ctr"/>
           <a:lstStyle/>
           <a:p>
-            <a:pPr algn="l" indent="0" marL="0">
+            <a:pPr marL="0" indent="0" algn="l">
               <a:buNone/>
             </a:pPr>
             <a:r>
@@ -4082,7 +3836,7 @@
           <a:bodyPr wrap="square" lIns="0" tIns="0" rIns="0" bIns="0" rtlCol="0" anchor="ctr"/>
           <a:lstStyle/>
           <a:p>
-            <a:pPr algn="l" indent="0" marL="0">
+            <a:pPr marL="0" indent="0" algn="l">
               <a:buNone/>
             </a:pPr>
             <a:r>
@@ -4121,7 +3875,7 @@
           <a:bodyPr wrap="square" lIns="0" tIns="0" rIns="0" bIns="0" rtlCol="0" anchor="ctr"/>
           <a:lstStyle/>
           <a:p>
-            <a:pPr algn="l" indent="0" marL="0">
+            <a:pPr marL="0" indent="0" algn="l">
               <a:buNone/>
             </a:pPr>
             <a:r>
@@ -4163,7 +3917,7 @@
             <a:prstDash val="solid"/>
           </a:ln>
           <a:effectLst>
-            <a:outerShdw sx="100000" sy="100000" kx="0" ky="0" algn="bl" rotWithShape="0" blurRad="127000" dist="50800" dir="8100000">
+            <a:outerShdw blurRad="127000" dist="50800" dir="8100000" algn="bl" rotWithShape="0">
               <a:srgbClr val="000000">
                 <a:alpha val="10000"/>
               </a:srgbClr>
@@ -4192,7 +3946,7 @@
           <a:bodyPr wrap="square" lIns="0" tIns="0" rIns="0" bIns="0" rtlCol="0" anchor="ctr"/>
           <a:lstStyle/>
           <a:p>
-            <a:pPr algn="l" indent="0" marL="0">
+            <a:pPr marL="0" indent="0" algn="l">
               <a:buNone/>
             </a:pPr>
             <a:r>
@@ -4231,7 +3985,7 @@
           <a:bodyPr wrap="square" lIns="0" tIns="0" rIns="0" bIns="0" rtlCol="0" anchor="ctr"/>
           <a:lstStyle/>
           <a:p>
-            <a:pPr algn="l" indent="0" marL="0">
+            <a:pPr marL="0" indent="0" algn="l">
               <a:buNone/>
             </a:pPr>
             <a:r>
@@ -4295,7 +4049,7 @@
           <a:bodyPr wrap="square" lIns="0" tIns="0" rIns="0" bIns="0" rtlCol="0" anchor="ctr"/>
           <a:lstStyle/>
           <a:p>
-            <a:pPr algn="l" indent="0" marL="0">
+            <a:pPr marL="0" indent="0" algn="l">
               <a:buNone/>
             </a:pPr>
             <a:r>
@@ -4334,7 +4088,7 @@
           <a:bodyPr wrap="square" lIns="0" tIns="0" rIns="0" bIns="0" rtlCol="0" anchor="ctr"/>
           <a:lstStyle/>
           <a:p>
-            <a:pPr algn="l" indent="0" marL="0">
+            <a:pPr marL="0" indent="0" algn="l">
               <a:buNone/>
             </a:pPr>
             <a:r>
@@ -4376,7 +4130,7 @@
             <a:prstDash val="solid"/>
           </a:ln>
           <a:effectLst>
-            <a:outerShdw sx="100000" sy="100000" kx="0" ky="0" algn="bl" rotWithShape="0" blurRad="127000" dist="50800" dir="8100000">
+            <a:outerShdw blurRad="127000" dist="50800" dir="8100000" algn="bl" rotWithShape="0">
               <a:srgbClr val="000000">
                 <a:alpha val="10000"/>
               </a:srgbClr>
@@ -4405,7 +4159,7 @@
           <a:bodyPr wrap="square" lIns="0" tIns="0" rIns="0" bIns="0" rtlCol="0" anchor="ctr"/>
           <a:lstStyle/>
           <a:p>
-            <a:pPr algn="l" indent="0" marL="0">
+            <a:pPr marL="0" indent="0" algn="l">
               <a:buNone/>
             </a:pPr>
             <a:r>
@@ -4444,7 +4198,7 @@
           <a:bodyPr wrap="square" lIns="0" tIns="0" rIns="0" bIns="0" rtlCol="0" anchor="ctr"/>
           <a:lstStyle/>
           <a:p>
-            <a:pPr algn="l" indent="0" marL="0">
+            <a:pPr marL="0" indent="0" algn="l">
               <a:buNone/>
             </a:pPr>
             <a:r>
@@ -4508,7 +4262,7 @@
           <a:bodyPr wrap="square" lIns="0" tIns="0" rIns="0" bIns="0" rtlCol="0" anchor="ctr"/>
           <a:lstStyle/>
           <a:p>
-            <a:pPr algn="l" indent="0" marL="0">
+            <a:pPr marL="0" indent="0" algn="l">
               <a:buNone/>
             </a:pPr>
             <a:r>
@@ -4547,7 +4301,7 @@
           <a:bodyPr wrap="square" lIns="0" tIns="0" rIns="0" bIns="0" rtlCol="0" anchor="ctr"/>
           <a:lstStyle/>
           <a:p>
-            <a:pPr algn="l" indent="0" marL="0">
+            <a:pPr marL="0" indent="0" algn="l">
               <a:buNone/>
             </a:pPr>
             <a:r>
@@ -4581,6 +4335,7 @@
         <a:solidFill>
           <a:srgbClr val="FAF9F6"/>
         </a:solidFill>
+        <a:effectLst/>
       </p:bgPr>
     </p:bg>
     <p:spTree>
@@ -4643,7 +4398,7 @@
           <a:bodyPr wrap="square" rtlCol="0" anchor="ctr"/>
           <a:lstStyle/>
           <a:p>
-            <a:pPr indent="0" marL="0">
+            <a:pPr marL="0" indent="0">
               <a:buNone/>
             </a:pPr>
             <a:r>
@@ -4685,7 +4440,7 @@
             <a:prstDash val="solid"/>
           </a:ln>
           <a:effectLst>
-            <a:outerShdw sx="100000" sy="100000" kx="0" ky="0" algn="bl" rotWithShape="0" blurRad="127000" dist="50800" dir="8100000">
+            <a:outerShdw blurRad="127000" dist="50800" dir="8100000" algn="bl" rotWithShape="0">
               <a:srgbClr val="000000">
                 <a:alpha val="10000"/>
               </a:srgbClr>
@@ -4739,7 +4494,7 @@
           <a:bodyPr wrap="square" lIns="0" tIns="0" rIns="0" bIns="0" rtlCol="0" anchor="ctr"/>
           <a:lstStyle/>
           <a:p>
-            <a:pPr algn="l" indent="0" marL="0">
+            <a:pPr marL="0" indent="0" algn="l">
               <a:buNone/>
             </a:pPr>
             <a:r>
@@ -4778,11 +4533,11 @@
           <a:bodyPr wrap="square" lIns="0" tIns="0" rIns="0" bIns="0" rtlCol="0" anchor="ctr"/>
           <a:lstStyle/>
           <a:p>
-            <a:pPr algn="r" indent="0" marL="0">
-              <a:buNone/>
-            </a:pPr>
-            <a:r>
-              <a:rPr lang="en-US" sz="750" b="1" spc="100" kern="0" dirty="0">
+            <a:pPr marL="0" indent="0" algn="r">
+              <a:buNone/>
+            </a:pPr>
+            <a:r>
+              <a:rPr lang="en-US" sz="750" b="1" kern="0" spc="100" dirty="0">
                 <a:solidFill>
                   <a:srgbClr val="B85042"/>
                 </a:solidFill>
@@ -4817,7 +4572,7 @@
           <a:bodyPr wrap="square" lIns="0" tIns="0" rIns="0" bIns="0" rtlCol="0" anchor="ctr"/>
           <a:lstStyle/>
           <a:p>
-            <a:pPr algn="l" indent="0" marL="0">
+            <a:pPr marL="0" indent="0" algn="l">
               <a:buNone/>
             </a:pPr>
             <a:r>
@@ -4859,7 +4614,7 @@
             <a:prstDash val="solid"/>
           </a:ln>
           <a:effectLst>
-            <a:outerShdw sx="100000" sy="100000" kx="0" ky="0" algn="bl" rotWithShape="0" blurRad="127000" dist="50800" dir="8100000">
+            <a:outerShdw blurRad="127000" dist="50800" dir="8100000" algn="bl" rotWithShape="0">
               <a:srgbClr val="000000">
                 <a:alpha val="10000"/>
               </a:srgbClr>
@@ -4913,7 +4668,7 @@
           <a:bodyPr wrap="square" lIns="0" tIns="0" rIns="0" bIns="0" rtlCol="0" anchor="ctr"/>
           <a:lstStyle/>
           <a:p>
-            <a:pPr algn="l" indent="0" marL="0">
+            <a:pPr marL="0" indent="0" algn="l">
               <a:buNone/>
             </a:pPr>
             <a:r>
@@ -4952,11 +4707,11 @@
           <a:bodyPr wrap="square" lIns="0" tIns="0" rIns="0" bIns="0" rtlCol="0" anchor="ctr"/>
           <a:lstStyle/>
           <a:p>
-            <a:pPr algn="r" indent="0" marL="0">
-              <a:buNone/>
-            </a:pPr>
-            <a:r>
-              <a:rPr lang="en-US" sz="750" b="1" spc="100" kern="0" dirty="0">
+            <a:pPr marL="0" indent="0" algn="r">
+              <a:buNone/>
+            </a:pPr>
+            <a:r>
+              <a:rPr lang="en-US" sz="750" b="1" kern="0" spc="100" dirty="0">
                 <a:solidFill>
                   <a:srgbClr val="6B9E8A"/>
                 </a:solidFill>
@@ -4991,7 +4746,7 @@
           <a:bodyPr wrap="square" lIns="0" tIns="0" rIns="0" bIns="0" rtlCol="0" anchor="ctr"/>
           <a:lstStyle/>
           <a:p>
-            <a:pPr algn="l" indent="0" marL="0">
+            <a:pPr marL="0" indent="0" algn="l">
               <a:buNone/>
             </a:pPr>
             <a:r>
@@ -5033,7 +4788,7 @@
             <a:prstDash val="solid"/>
           </a:ln>
           <a:effectLst>
-            <a:outerShdw sx="100000" sy="100000" kx="0" ky="0" algn="bl" rotWithShape="0" blurRad="127000" dist="50800" dir="8100000">
+            <a:outerShdw blurRad="127000" dist="50800" dir="8100000" algn="bl" rotWithShape="0">
               <a:srgbClr val="000000">
                 <a:alpha val="10000"/>
               </a:srgbClr>
@@ -5087,7 +4842,7 @@
           <a:bodyPr wrap="square" lIns="0" tIns="0" rIns="0" bIns="0" rtlCol="0" anchor="ctr"/>
           <a:lstStyle/>
           <a:p>
-            <a:pPr algn="l" indent="0" marL="0">
+            <a:pPr marL="0" indent="0" algn="l">
               <a:buNone/>
             </a:pPr>
             <a:r>
@@ -5126,11 +4881,11 @@
           <a:bodyPr wrap="square" lIns="0" tIns="0" rIns="0" bIns="0" rtlCol="0" anchor="ctr"/>
           <a:lstStyle/>
           <a:p>
-            <a:pPr algn="r" indent="0" marL="0">
-              <a:buNone/>
-            </a:pPr>
-            <a:r>
-              <a:rPr lang="en-US" sz="750" b="1" spc="100" kern="0" dirty="0">
+            <a:pPr marL="0" indent="0" algn="r">
+              <a:buNone/>
+            </a:pPr>
+            <a:r>
+              <a:rPr lang="en-US" sz="750" b="1" kern="0" spc="100" dirty="0">
                 <a:solidFill>
                   <a:srgbClr val="C9A84C"/>
                 </a:solidFill>
@@ -5165,7 +4920,7 @@
           <a:bodyPr wrap="square" lIns="0" tIns="0" rIns="0" bIns="0" rtlCol="0" anchor="ctr"/>
           <a:lstStyle/>
           <a:p>
-            <a:pPr algn="l" indent="0" marL="0">
+            <a:pPr marL="0" indent="0" algn="l">
               <a:buNone/>
             </a:pPr>
             <a:r>
@@ -5207,7 +4962,7 @@
             <a:prstDash val="solid"/>
           </a:ln>
           <a:effectLst>
-            <a:outerShdw sx="100000" sy="100000" kx="0" ky="0" algn="bl" rotWithShape="0" blurRad="127000" dist="50800" dir="8100000">
+            <a:outerShdw blurRad="127000" dist="50800" dir="8100000" algn="bl" rotWithShape="0">
               <a:srgbClr val="000000">
                 <a:alpha val="10000"/>
               </a:srgbClr>
@@ -5261,7 +5016,7 @@
           <a:bodyPr wrap="square" lIns="0" tIns="0" rIns="0" bIns="0" rtlCol="0" anchor="ctr"/>
           <a:lstStyle/>
           <a:p>
-            <a:pPr algn="l" indent="0" marL="0">
+            <a:pPr marL="0" indent="0" algn="l">
               <a:buNone/>
             </a:pPr>
             <a:r>
@@ -5300,11 +5055,11 @@
           <a:bodyPr wrap="square" lIns="0" tIns="0" rIns="0" bIns="0" rtlCol="0" anchor="ctr"/>
           <a:lstStyle/>
           <a:p>
-            <a:pPr algn="r" indent="0" marL="0">
-              <a:buNone/>
-            </a:pPr>
-            <a:r>
-              <a:rPr lang="en-US" sz="750" b="1" spc="100" kern="0" dirty="0">
+            <a:pPr marL="0" indent="0" algn="r">
+              <a:buNone/>
+            </a:pPr>
+            <a:r>
+              <a:rPr lang="en-US" sz="750" b="1" kern="0" spc="100" dirty="0">
                 <a:solidFill>
                   <a:srgbClr val="3D3D3D"/>
                 </a:solidFill>
@@ -5339,7 +5094,7 @@
           <a:bodyPr wrap="square" lIns="0" tIns="0" rIns="0" bIns="0" rtlCol="0" anchor="ctr"/>
           <a:lstStyle/>
           <a:p>
-            <a:pPr algn="l" indent="0" marL="0">
+            <a:pPr marL="0" indent="0" algn="l">
               <a:buNone/>
             </a:pPr>
             <a:r>
@@ -5373,6 +5128,7 @@
         <a:solidFill>
           <a:srgbClr val="2C2C2C"/>
         </a:solidFill>
+        <a:effectLst/>
       </p:bgPr>
     </p:bg>
     <p:spTree>
@@ -5435,7 +5191,7 @@
           <a:bodyPr wrap="square" rtlCol="0" anchor="ctr"/>
           <a:lstStyle/>
           <a:p>
-            <a:pPr algn="l" indent="0" marL="0">
+            <a:pPr marL="0" indent="0" algn="l">
               <a:buNone/>
             </a:pPr>
             <a:r>
@@ -5502,7 +5258,7 @@
             <a:prstDash val="solid"/>
           </a:ln>
           <a:effectLst>
-            <a:outerShdw sx="100000" sy="100000" kx="0" ky="0" algn="bl" rotWithShape="0" blurRad="127000" dist="50800" dir="8100000">
+            <a:outerShdw blurRad="127000" dist="50800" dir="8100000" algn="bl" rotWithShape="0">
               <a:srgbClr val="000000">
                 <a:alpha val="10000"/>
               </a:srgbClr>
@@ -5510,30 +5266,6 @@
           </a:effectLst>
         </p:spPr>
       </p:sp>
-      <p:pic>
-        <p:nvPicPr>
-          <p:cNvPr id="6" name="Image 0" descr="/home/claude/cluster_viz.png">    </p:cNvPr>
-          <p:cNvPicPr>
-            <a:picLocks noChangeAspect="1"/>
-          </p:cNvPicPr>
-          <p:nvPr/>
-        </p:nvPicPr>
-        <p:blipFill>
-          <a:blip r:embed="rId1"/>
-          <a:stretch>
-            <a:fillRect/>
-          </a:stretch>
-        </p:blipFill>
-        <p:spPr>
-          <a:xfrm>
-            <a:off x="365760" y="914400"/>
-            <a:ext cx="5486400" cy="3931920"/>
-          </a:xfrm>
-          <a:prstGeom prst="rect">
-            <a:avLst/>
-          </a:prstGeom>
-        </p:spPr>
-      </p:pic>
       <p:sp>
         <p:nvSpPr>
           <p:cNvPr id="7" name="Shape 4"/>
@@ -5605,7 +5337,7 @@
           <a:bodyPr wrap="square" lIns="0" tIns="0" rIns="0" bIns="0" rtlCol="0" anchor="ctr"/>
           <a:lstStyle/>
           <a:p>
-            <a:pPr algn="l" indent="0" marL="0">
+            <a:pPr marL="0" indent="0" algn="l">
               <a:buNone/>
             </a:pPr>
             <a:r>
@@ -5644,7 +5376,7 @@
           <a:bodyPr wrap="square" lIns="0" tIns="0" rIns="0" bIns="0" rtlCol="0" anchor="ctr"/>
           <a:lstStyle/>
           <a:p>
-            <a:pPr algn="l" indent="0" marL="0">
+            <a:pPr marL="0" indent="0" algn="l">
               <a:buNone/>
             </a:pPr>
             <a:r>
@@ -5733,7 +5465,7 @@
           <a:bodyPr wrap="square" lIns="0" tIns="0" rIns="0" bIns="0" rtlCol="0" anchor="ctr"/>
           <a:lstStyle/>
           <a:p>
-            <a:pPr algn="l" indent="0" marL="0">
+            <a:pPr marL="0" indent="0" algn="l">
               <a:buNone/>
             </a:pPr>
             <a:r>
@@ -5772,7 +5504,7 @@
           <a:bodyPr wrap="square" lIns="0" tIns="0" rIns="0" bIns="0" rtlCol="0" anchor="ctr"/>
           <a:lstStyle/>
           <a:p>
-            <a:pPr algn="l" indent="0" marL="0">
+            <a:pPr marL="0" indent="0" algn="l">
               <a:buNone/>
             </a:pPr>
             <a:r>
@@ -5861,7 +5593,7 @@
           <a:bodyPr wrap="square" lIns="0" tIns="0" rIns="0" bIns="0" rtlCol="0" anchor="ctr"/>
           <a:lstStyle/>
           <a:p>
-            <a:pPr algn="l" indent="0" marL="0">
+            <a:pPr marL="0" indent="0" algn="l">
               <a:buNone/>
             </a:pPr>
             <a:r>
@@ -5900,7 +5632,7 @@
           <a:bodyPr wrap="square" lIns="0" tIns="0" rIns="0" bIns="0" rtlCol="0" anchor="ctr"/>
           <a:lstStyle/>
           <a:p>
-            <a:pPr algn="l" indent="0" marL="0">
+            <a:pPr marL="0" indent="0" algn="l">
               <a:buNone/>
             </a:pPr>
             <a:r>
@@ -5989,7 +5721,7 @@
           <a:bodyPr wrap="square" lIns="0" tIns="0" rIns="0" bIns="0" rtlCol="0" anchor="ctr"/>
           <a:lstStyle/>
           <a:p>
-            <a:pPr algn="l" indent="0" marL="0">
+            <a:pPr marL="0" indent="0" algn="l">
               <a:buNone/>
             </a:pPr>
             <a:r>
@@ -6028,7 +5760,7 @@
           <a:bodyPr wrap="square" lIns="0" tIns="0" rIns="0" bIns="0" rtlCol="0" anchor="ctr"/>
           <a:lstStyle/>
           <a:p>
-            <a:pPr algn="l" indent="0" marL="0">
+            <a:pPr marL="0" indent="0" algn="l">
               <a:buNone/>
             </a:pPr>
             <a:r>
@@ -6046,6 +5778,36 @@
           </a:p>
         </p:txBody>
       </p:sp>
+      <p:pic>
+        <p:nvPicPr>
+          <p:cNvPr id="24" name="Picture 23">
+            <a:extLst>
+              <a:ext uri="{FF2B5EF4-FFF2-40B4-BE49-F238E27FC236}">
+                <a16:creationId xmlns:a16="http://schemas.microsoft.com/office/drawing/2014/main" id="{9BFD26CB-D96E-9A0A-8434-938962F767D7}"/>
+              </a:ext>
+            </a:extLst>
+          </p:cNvPr>
+          <p:cNvPicPr>
+            <a:picLocks noChangeAspect="1"/>
+          </p:cNvPicPr>
+          <p:nvPr/>
+        </p:nvPicPr>
+        <p:blipFill>
+          <a:blip r:embed="rId3"/>
+          <a:stretch>
+            <a:fillRect/>
+          </a:stretch>
+        </p:blipFill>
+        <p:spPr>
+          <a:xfrm>
+            <a:off x="372655" y="907065"/>
+            <a:ext cx="5525225" cy="3946589"/>
+          </a:xfrm>
+          <a:prstGeom prst="rect">
+            <a:avLst/>
+          </a:prstGeom>
+        </p:spPr>
+      </p:pic>
     </p:spTree>
   </p:cSld>
   <p:clrMapOvr>
@@ -6062,6 +5824,7 @@
         <a:solidFill>
           <a:srgbClr val="E7E8D1"/>
         </a:solidFill>
+        <a:effectLst/>
       </p:bgPr>
     </p:bg>
     <p:spTree>
@@ -6099,7 +5862,7 @@
           <a:bodyPr wrap="square" lIns="0" tIns="0" rIns="0" bIns="0" rtlCol="0" anchor="ctr"/>
           <a:lstStyle/>
           <a:p>
-            <a:pPr algn="l" indent="0" marL="0">
+            <a:pPr marL="0" indent="0" algn="l">
               <a:buNone/>
             </a:pPr>
             <a:r>
@@ -6140,7 +5903,7 @@
           <a:bodyPr wrap="square" rtlCol="0" anchor="ctr"/>
           <a:lstStyle/>
           <a:p>
-            <a:pPr indent="0" marL="0">
+            <a:pPr marL="0" indent="0">
               <a:buNone/>
             </a:pPr>
             <a:r>
@@ -6232,7 +5995,7 @@
             <a:prstDash val="solid"/>
           </a:ln>
           <a:effectLst>
-            <a:outerShdw sx="100000" sy="100000" kx="0" ky="0" algn="bl" rotWithShape="0" blurRad="127000" dist="50800" dir="8100000">
+            <a:outerShdw blurRad="127000" dist="50800" dir="8100000" algn="bl" rotWithShape="0">
               <a:srgbClr val="000000">
                 <a:alpha val="10000"/>
               </a:srgbClr>
@@ -6261,7 +6024,7 @@
           <a:bodyPr wrap="square" lIns="0" tIns="0" rIns="0" bIns="0" rtlCol="0" anchor="ctr"/>
           <a:lstStyle/>
           <a:p>
-            <a:pPr algn="l" indent="0" marL="0">
+            <a:pPr marL="0" indent="0" algn="l">
               <a:buNone/>
             </a:pPr>
             <a:r>
@@ -6300,7 +6063,7 @@
           <a:bodyPr wrap="square" lIns="0" tIns="0" rIns="0" bIns="0" rtlCol="0" anchor="ctr"/>
           <a:lstStyle/>
           <a:p>
-            <a:pPr algn="l" indent="0" marL="0">
+            <a:pPr marL="0" indent="0" algn="l">
               <a:buNone/>
             </a:pPr>
             <a:r>
@@ -6364,7 +6127,7 @@
           <a:bodyPr wrap="square" lIns="0" tIns="0" rIns="0" bIns="0" rtlCol="0" anchor="ctr"/>
           <a:lstStyle/>
           <a:p>
-            <a:pPr algn="l" indent="0" marL="0">
+            <a:pPr marL="0" indent="0" algn="l">
               <a:buNone/>
             </a:pPr>
             <a:r>
@@ -6403,7 +6166,7 @@
           <a:bodyPr wrap="square" lIns="0" tIns="0" rIns="0" bIns="0" rtlCol="0" anchor="ctr"/>
           <a:lstStyle/>
           <a:p>
-            <a:pPr algn="l" indent="0" marL="0">
+            <a:pPr marL="0" indent="0" algn="l">
               <a:buNone/>
             </a:pPr>
             <a:r>
@@ -6470,7 +6233,7 @@
             <a:prstDash val="solid"/>
           </a:ln>
           <a:effectLst>
-            <a:outerShdw sx="100000" sy="100000" kx="0" ky="0" algn="bl" rotWithShape="0" blurRad="127000" dist="50800" dir="8100000">
+            <a:outerShdw blurRad="127000" dist="50800" dir="8100000" algn="bl" rotWithShape="0">
               <a:srgbClr val="000000">
                 <a:alpha val="10000"/>
               </a:srgbClr>
@@ -6499,7 +6262,7 @@
           <a:bodyPr wrap="square" lIns="0" tIns="0" rIns="0" bIns="0" rtlCol="0" anchor="ctr"/>
           <a:lstStyle/>
           <a:p>
-            <a:pPr algn="l" indent="0" marL="0">
+            <a:pPr marL="0" indent="0" algn="l">
               <a:buNone/>
             </a:pPr>
             <a:r>
@@ -6538,7 +6301,7 @@
           <a:bodyPr wrap="square" lIns="0" tIns="0" rIns="0" bIns="0" rtlCol="0" anchor="ctr"/>
           <a:lstStyle/>
           <a:p>
-            <a:pPr algn="l" indent="0" marL="0">
+            <a:pPr marL="0" indent="0" algn="l">
               <a:buNone/>
             </a:pPr>
             <a:r>
@@ -6602,7 +6365,7 @@
           <a:bodyPr wrap="square" lIns="0" tIns="0" rIns="0" bIns="0" rtlCol="0" anchor="ctr"/>
           <a:lstStyle/>
           <a:p>
-            <a:pPr algn="l" indent="0" marL="0">
+            <a:pPr marL="0" indent="0" algn="l">
               <a:buNone/>
             </a:pPr>
             <a:r>
@@ -6641,7 +6404,7 @@
           <a:bodyPr wrap="square" lIns="0" tIns="0" rIns="0" bIns="0" rtlCol="0" anchor="ctr"/>
           <a:lstStyle/>
           <a:p>
-            <a:pPr algn="l" indent="0" marL="0">
+            <a:pPr marL="0" indent="0" algn="l">
               <a:buNone/>
             </a:pPr>
             <a:r>
@@ -6708,7 +6471,7 @@
             <a:prstDash val="solid"/>
           </a:ln>
           <a:effectLst>
-            <a:outerShdw sx="100000" sy="100000" kx="0" ky="0" algn="bl" rotWithShape="0" blurRad="127000" dist="50800" dir="8100000">
+            <a:outerShdw blurRad="127000" dist="50800" dir="8100000" algn="bl" rotWithShape="0">
               <a:srgbClr val="000000">
                 <a:alpha val="10000"/>
               </a:srgbClr>
@@ -6737,7 +6500,7 @@
           <a:bodyPr wrap="square" lIns="0" tIns="0" rIns="0" bIns="0" rtlCol="0" anchor="ctr"/>
           <a:lstStyle/>
           <a:p>
-            <a:pPr algn="l" indent="0" marL="0">
+            <a:pPr marL="0" indent="0" algn="l">
               <a:buNone/>
             </a:pPr>
             <a:r>
@@ -6776,7 +6539,7 @@
           <a:bodyPr wrap="square" lIns="0" tIns="0" rIns="0" bIns="0" rtlCol="0" anchor="ctr"/>
           <a:lstStyle/>
           <a:p>
-            <a:pPr algn="l" indent="0" marL="0">
+            <a:pPr marL="0" indent="0" algn="l">
               <a:buNone/>
             </a:pPr>
             <a:r>
@@ -6840,7 +6603,7 @@
           <a:bodyPr wrap="square" lIns="0" tIns="0" rIns="0" bIns="0" rtlCol="0" anchor="ctr"/>
           <a:lstStyle/>
           <a:p>
-            <a:pPr algn="l" indent="0" marL="0">
+            <a:pPr marL="0" indent="0" algn="l">
               <a:buNone/>
             </a:pPr>
             <a:r>
@@ -6879,7 +6642,7 @@
           <a:bodyPr wrap="square" lIns="0" tIns="0" rIns="0" bIns="0" rtlCol="0" anchor="ctr"/>
           <a:lstStyle/>
           <a:p>
-            <a:pPr algn="l" indent="0" marL="0">
+            <a:pPr marL="0" indent="0" algn="l">
               <a:buNone/>
             </a:pPr>
             <a:r>
@@ -6946,7 +6709,7 @@
             <a:prstDash val="solid"/>
           </a:ln>
           <a:effectLst>
-            <a:outerShdw sx="100000" sy="100000" kx="0" ky="0" algn="bl" rotWithShape="0" blurRad="127000" dist="50800" dir="8100000">
+            <a:outerShdw blurRad="127000" dist="50800" dir="8100000" algn="bl" rotWithShape="0">
               <a:srgbClr val="000000">
                 <a:alpha val="10000"/>
               </a:srgbClr>
@@ -6975,7 +6738,7 @@
           <a:bodyPr wrap="square" lIns="0" tIns="0" rIns="0" bIns="0" rtlCol="0" anchor="ctr"/>
           <a:lstStyle/>
           <a:p>
-            <a:pPr algn="l" indent="0" marL="0">
+            <a:pPr marL="0" indent="0" algn="l">
               <a:buNone/>
             </a:pPr>
             <a:r>
@@ -7014,7 +6777,7 @@
           <a:bodyPr wrap="square" lIns="0" tIns="0" rIns="0" bIns="0" rtlCol="0" anchor="ctr"/>
           <a:lstStyle/>
           <a:p>
-            <a:pPr algn="l" indent="0" marL="0">
+            <a:pPr marL="0" indent="0" algn="l">
               <a:buNone/>
             </a:pPr>
             <a:r>
@@ -7078,7 +6841,7 @@
           <a:bodyPr wrap="square" lIns="0" tIns="0" rIns="0" bIns="0" rtlCol="0" anchor="ctr"/>
           <a:lstStyle/>
           <a:p>
-            <a:pPr algn="l" indent="0" marL="0">
+            <a:pPr marL="0" indent="0" algn="l">
               <a:buNone/>
             </a:pPr>
             <a:r>
@@ -7117,7 +6880,7 @@
           <a:bodyPr wrap="square" lIns="0" tIns="0" rIns="0" bIns="0" rtlCol="0" anchor="ctr"/>
           <a:lstStyle/>
           <a:p>
-            <a:pPr algn="l" indent="0" marL="0">
+            <a:pPr marL="0" indent="0" algn="l">
               <a:buNone/>
             </a:pPr>
             <a:r>
@@ -7151,6 +6914,7 @@
         <a:solidFill>
           <a:srgbClr val="FAF9F6"/>
         </a:solidFill>
+        <a:effectLst/>
       </p:bgPr>
     </p:bg>
     <p:spTree>
@@ -7238,7 +7002,7 @@
           <a:bodyPr wrap="square" lIns="0" tIns="0" rIns="0" bIns="0" rtlCol="0" anchor="ctr"/>
           <a:lstStyle/>
           <a:p>
-            <a:pPr algn="l" indent="0" marL="0">
+            <a:pPr marL="0" indent="0" algn="l">
               <a:buNone/>
             </a:pPr>
             <a:r>
@@ -7277,7 +7041,7 @@
           <a:bodyPr wrap="square" rtlCol="0" anchor="ctr"/>
           <a:lstStyle/>
           <a:p>
-            <a:pPr algn="l" indent="0" marL="0">
+            <a:pPr marL="0" indent="0" algn="l">
               <a:buNone/>
             </a:pPr>
             <a:r>
@@ -7294,7 +7058,7 @@
             <a:endParaRPr lang="en-US" sz="2800" dirty="0"/>
           </a:p>
           <a:p>
-            <a:pPr algn="l" indent="0" marL="0">
+            <a:pPr marL="0" indent="0" algn="l">
               <a:buNone/>
             </a:pPr>
             <a:r>
@@ -7383,7 +7147,7 @@
           <a:bodyPr wrap="square" lIns="0" tIns="0" rIns="0" bIns="0" rtlCol="0" anchor="ctr"/>
           <a:lstStyle/>
           <a:p>
-            <a:pPr algn="l" indent="0" marL="0">
+            <a:pPr marL="0" indent="0" algn="l">
               <a:buNone/>
             </a:pPr>
             <a:r>
@@ -7422,7 +7186,7 @@
           <a:bodyPr wrap="square" lIns="0" tIns="0" rIns="0" bIns="0" rtlCol="0" anchor="ctr"/>
           <a:lstStyle/>
           <a:p>
-            <a:pPr algn="l" indent="0" marL="0">
+            <a:pPr marL="0" indent="0" algn="l">
               <a:buNone/>
             </a:pPr>
             <a:r>
@@ -7511,7 +7275,7 @@
           <a:bodyPr wrap="square" lIns="0" tIns="0" rIns="0" bIns="0" rtlCol="0" anchor="ctr"/>
           <a:lstStyle/>
           <a:p>
-            <a:pPr algn="l" indent="0" marL="0">
+            <a:pPr marL="0" indent="0" algn="l">
               <a:buNone/>
             </a:pPr>
             <a:r>
@@ -7550,7 +7314,7 @@
           <a:bodyPr wrap="square" lIns="0" tIns="0" rIns="0" bIns="0" rtlCol="0" anchor="ctr"/>
           <a:lstStyle/>
           <a:p>
-            <a:pPr algn="l" indent="0" marL="0">
+            <a:pPr marL="0" indent="0" algn="l">
               <a:buNone/>
             </a:pPr>
             <a:r>
@@ -7639,7 +7403,7 @@
           <a:bodyPr wrap="square" lIns="0" tIns="0" rIns="0" bIns="0" rtlCol="0" anchor="ctr"/>
           <a:lstStyle/>
           <a:p>
-            <a:pPr algn="l" indent="0" marL="0">
+            <a:pPr marL="0" indent="0" algn="l">
               <a:buNone/>
             </a:pPr>
             <a:r>
@@ -7678,7 +7442,7 @@
           <a:bodyPr wrap="square" lIns="0" tIns="0" rIns="0" bIns="0" rtlCol="0" anchor="ctr"/>
           <a:lstStyle/>
           <a:p>
-            <a:pPr algn="l" indent="0" marL="0">
+            <a:pPr marL="0" indent="0" algn="l">
               <a:buNone/>
             </a:pPr>
             <a:r>
@@ -7720,7 +7484,7 @@
             <a:prstDash val="solid"/>
           </a:ln>
           <a:effectLst>
-            <a:outerShdw sx="100000" sy="100000" kx="0" ky="0" algn="bl" rotWithShape="0" blurRad="127000" dist="50800" dir="8100000">
+            <a:outerShdw blurRad="127000" dist="50800" dir="8100000" algn="bl" rotWithShape="0">
               <a:srgbClr val="000000">
                 <a:alpha val="10000"/>
               </a:srgbClr>
@@ -7774,7 +7538,7 @@
           <a:bodyPr wrap="square" lIns="0" tIns="0" rIns="0" bIns="0" rtlCol="0" anchor="ctr"/>
           <a:lstStyle/>
           <a:p>
-            <a:pPr algn="l" indent="0" marL="0">
+            <a:pPr marL="0" indent="0" algn="l">
               <a:buNone/>
             </a:pPr>
             <a:r>
@@ -7813,7 +7577,7 @@
           <a:bodyPr wrap="square" lIns="0" tIns="0" rIns="0" bIns="0" rtlCol="0" anchor="ctr"/>
           <a:lstStyle/>
           <a:p>
-            <a:pPr algn="l" indent="0" marL="0">
+            <a:pPr marL="0" indent="0" algn="l">
               <a:buNone/>
             </a:pPr>
             <a:r>
@@ -7855,7 +7619,7 @@
             <a:prstDash val="solid"/>
           </a:ln>
           <a:effectLst>
-            <a:outerShdw sx="100000" sy="100000" kx="0" ky="0" algn="bl" rotWithShape="0" blurRad="127000" dist="50800" dir="8100000">
+            <a:outerShdw blurRad="127000" dist="50800" dir="8100000" algn="bl" rotWithShape="0">
               <a:srgbClr val="000000">
                 <a:alpha val="10000"/>
               </a:srgbClr>
@@ -7909,7 +7673,7 @@
           <a:bodyPr wrap="square" lIns="0" tIns="0" rIns="0" bIns="0" rtlCol="0" anchor="ctr"/>
           <a:lstStyle/>
           <a:p>
-            <a:pPr algn="l" indent="0" marL="0">
+            <a:pPr marL="0" indent="0" algn="l">
               <a:buNone/>
             </a:pPr>
             <a:r>
@@ -7948,7 +7712,7 @@
           <a:bodyPr wrap="square" lIns="0" tIns="0" rIns="0" bIns="0" rtlCol="0" anchor="ctr"/>
           <a:lstStyle/>
           <a:p>
-            <a:pPr algn="l" indent="0" marL="0">
+            <a:pPr marL="0" indent="0" algn="l">
               <a:buNone/>
             </a:pPr>
             <a:r>
@@ -7990,7 +7754,7 @@
             <a:prstDash val="solid"/>
           </a:ln>
           <a:effectLst>
-            <a:outerShdw sx="100000" sy="100000" kx="0" ky="0" algn="bl" rotWithShape="0" blurRad="127000" dist="50800" dir="8100000">
+            <a:outerShdw blurRad="127000" dist="50800" dir="8100000" algn="bl" rotWithShape="0">
               <a:srgbClr val="000000">
                 <a:alpha val="10000"/>
               </a:srgbClr>
@@ -8044,7 +7808,7 @@
           <a:bodyPr wrap="square" lIns="0" tIns="0" rIns="0" bIns="0" rtlCol="0" anchor="ctr"/>
           <a:lstStyle/>
           <a:p>
-            <a:pPr algn="l" indent="0" marL="0">
+            <a:pPr marL="0" indent="0" algn="l">
               <a:buNone/>
             </a:pPr>
             <a:r>
@@ -8083,7 +7847,7 @@
           <a:bodyPr wrap="square" lIns="0" tIns="0" rIns="0" bIns="0" rtlCol="0" anchor="ctr"/>
           <a:lstStyle/>
           <a:p>
-            <a:pPr algn="l" indent="0" marL="0">
+            <a:pPr marL="0" indent="0" algn="l">
               <a:buNone/>
             </a:pPr>
             <a:r>
@@ -8125,7 +7889,7 @@
             <a:prstDash val="solid"/>
           </a:ln>
           <a:effectLst>
-            <a:outerShdw sx="100000" sy="100000" kx="0" ky="0" algn="bl" rotWithShape="0" blurRad="127000" dist="50800" dir="8100000">
+            <a:outerShdw blurRad="127000" dist="50800" dir="8100000" algn="bl" rotWithShape="0">
               <a:srgbClr val="000000">
                 <a:alpha val="10000"/>
               </a:srgbClr>
@@ -8179,7 +7943,7 @@
           <a:bodyPr wrap="square" lIns="0" tIns="0" rIns="0" bIns="0" rtlCol="0" anchor="ctr"/>
           <a:lstStyle/>
           <a:p>
-            <a:pPr algn="l" indent="0" marL="0">
+            <a:pPr marL="0" indent="0" algn="l">
               <a:buNone/>
             </a:pPr>
             <a:r>
@@ -8218,7 +7982,7 @@
           <a:bodyPr wrap="square" lIns="0" tIns="0" rIns="0" bIns="0" rtlCol="0" anchor="ctr"/>
           <a:lstStyle/>
           <a:p>
-            <a:pPr algn="l" indent="0" marL="0">
+            <a:pPr marL="0" indent="0" algn="l">
               <a:buNone/>
             </a:pPr>
             <a:r>
@@ -8252,6 +8016,7 @@
         <a:solidFill>
           <a:srgbClr val="E7E8D1"/>
         </a:solidFill>
+        <a:effectLst/>
       </p:bgPr>
     </p:bg>
     <p:spTree>
@@ -8339,7 +8104,7 @@
           <a:bodyPr wrap="square" lIns="0" tIns="0" rIns="0" bIns="0" rtlCol="0" anchor="ctr"/>
           <a:lstStyle/>
           <a:p>
-            <a:pPr algn="r" indent="0" marL="0">
+            <a:pPr marL="0" indent="0" algn="r">
               <a:buNone/>
             </a:pPr>
             <a:r>
@@ -8380,7 +8145,7 @@
           <a:bodyPr wrap="square" rtlCol="0" anchor="ctr"/>
           <a:lstStyle/>
           <a:p>
-            <a:pPr algn="l" indent="0" marL="0">
+            <a:pPr marL="0" indent="0" algn="l">
               <a:buNone/>
             </a:pPr>
             <a:r>
@@ -8469,7 +8234,7 @@
           <a:bodyPr wrap="square" lIns="0" tIns="0" rIns="0" bIns="0" rtlCol="0" anchor="ctr"/>
           <a:lstStyle/>
           <a:p>
-            <a:pPr algn="l" indent="0" marL="0">
+            <a:pPr marL="0" indent="0" algn="l">
               <a:buNone/>
             </a:pPr>
             <a:r>
@@ -8508,7 +8273,7 @@
           <a:bodyPr wrap="square" lIns="0" tIns="0" rIns="0" bIns="0" rtlCol="0" anchor="ctr"/>
           <a:lstStyle/>
           <a:p>
-            <a:pPr algn="l" indent="0" marL="0">
+            <a:pPr marL="0" indent="0" algn="l">
               <a:buNone/>
             </a:pPr>
             <a:r>
@@ -8547,7 +8312,7 @@
           <a:bodyPr wrap="square" rtlCol="0" anchor="ctr"/>
           <a:lstStyle/>
           <a:p>
-            <a:pPr algn="ctr" indent="0" marL="0">
+            <a:pPr marL="0" indent="0" algn="ctr">
               <a:buNone/>
             </a:pPr>
             <a:r>
@@ -8866,4 +8631,299 @@
     </a:ext>
   </a:extLst>
 </a:theme>
+</file>
+
+<file path=ppt/theme/theme2.xml><?xml version="1.0" encoding="utf-8"?>
+<a:theme xmlns:a="http://schemas.openxmlformats.org/drawingml/2006/main" name="Office Theme">
+  <a:themeElements>
+    <a:clrScheme name="Office">
+      <a:dk1>
+        <a:sysClr val="windowText" lastClr="000000"/>
+      </a:dk1>
+      <a:lt1>
+        <a:sysClr val="window" lastClr="FFFFFF"/>
+      </a:lt1>
+      <a:dk2>
+        <a:srgbClr val="44546A"/>
+      </a:dk2>
+      <a:lt2>
+        <a:srgbClr val="E7E6E6"/>
+      </a:lt2>
+      <a:accent1>
+        <a:srgbClr val="4472C4"/>
+      </a:accent1>
+      <a:accent2>
+        <a:srgbClr val="ED7D31"/>
+      </a:accent2>
+      <a:accent3>
+        <a:srgbClr val="A5A5A5"/>
+      </a:accent3>
+      <a:accent4>
+        <a:srgbClr val="FFC000"/>
+      </a:accent4>
+      <a:accent5>
+        <a:srgbClr val="5B9BD5"/>
+      </a:accent5>
+      <a:accent6>
+        <a:srgbClr val="70AD47"/>
+      </a:accent6>
+      <a:hlink>
+        <a:srgbClr val="0563C1"/>
+      </a:hlink>
+      <a:folHlink>
+        <a:srgbClr val="954F72"/>
+      </a:folHlink>
+    </a:clrScheme>
+    <a:fontScheme name="Office">
+      <a:majorFont>
+        <a:latin typeface="Calibri Light" panose="020F0302020204030204"/>
+        <a:ea typeface=""/>
+        <a:cs typeface=""/>
+        <a:font script="Jpan" typeface="游ゴシック Light"/>
+        <a:font script="Hang" typeface="맑은 고딕"/>
+        <a:font script="Hans" typeface="等线 Light"/>
+        <a:font script="Hant" typeface="新細明體"/>
+        <a:font script="Arab" typeface="Times New Roman"/>
+        <a:font script="Hebr" typeface="Times New Roman"/>
+        <a:font script="Thai" typeface="Angsana New"/>
+        <a:font script="Ethi" typeface="Nyala"/>
+        <a:font script="Beng" typeface="Vrinda"/>
+        <a:font script="Gujr" typeface="Shruti"/>
+        <a:font script="Khmr" typeface="MoolBoran"/>
+        <a:font script="Knda" typeface="Tunga"/>
+        <a:font script="Guru" typeface="Raavi"/>
+        <a:font script="Cans" typeface="Euphemia"/>
+        <a:font script="Cher" typeface="Plantagenet Cherokee"/>
+        <a:font script="Yiii" typeface="Microsoft Yi Baiti"/>
+        <a:font script="Tibt" typeface="Microsoft Himalaya"/>
+        <a:font script="Thaa" typeface="MV Boli"/>
+        <a:font script="Deva" typeface="Mangal"/>
+        <a:font script="Telu" typeface="Gautami"/>
+        <a:font script="Taml" typeface="Latha"/>
+        <a:font script="Syrc" typeface="Estrangelo Edessa"/>
+        <a:font script="Orya" typeface="Kalinga"/>
+        <a:font script="Mlym" typeface="Kartika"/>
+        <a:font script="Laoo" typeface="DokChampa"/>
+        <a:font script="Sinh" typeface="Iskoola Pota"/>
+        <a:font script="Mong" typeface="Mongolian Baiti"/>
+        <a:font script="Viet" typeface="Times New Roman"/>
+        <a:font script="Uigh" typeface="Microsoft Uighur"/>
+        <a:font script="Geor" typeface="Sylfaen"/>
+        <a:font script="Armn" typeface="Arial"/>
+        <a:font script="Bugi" typeface="Leelawadee UI"/>
+        <a:font script="Bopo" typeface="Microsoft JhengHei"/>
+        <a:font script="Java" typeface="Javanese Text"/>
+        <a:font script="Lisu" typeface="Segoe UI"/>
+        <a:font script="Mymr" typeface="Myanmar Text"/>
+        <a:font script="Nkoo" typeface="Ebrima"/>
+        <a:font script="Olck" typeface="Nirmala UI"/>
+        <a:font script="Osma" typeface="Ebrima"/>
+        <a:font script="Phag" typeface="Phagspa"/>
+        <a:font script="Syrn" typeface="Estrangelo Edessa"/>
+        <a:font script="Syrj" typeface="Estrangelo Edessa"/>
+        <a:font script="Syre" typeface="Estrangelo Edessa"/>
+        <a:font script="Sora" typeface="Nirmala UI"/>
+        <a:font script="Tale" typeface="Microsoft Tai Le"/>
+        <a:font script="Talu" typeface="Microsoft New Tai Lue"/>
+        <a:font script="Tfng" typeface="Ebrima"/>
+      </a:majorFont>
+      <a:minorFont>
+        <a:latin typeface="Calibri" panose="020F0502020204030204"/>
+        <a:ea typeface=""/>
+        <a:cs typeface=""/>
+        <a:font script="Jpan" typeface="游ゴシック"/>
+        <a:font script="Hang" typeface="맑은 고딕"/>
+        <a:font script="Hans" typeface="等线"/>
+        <a:font script="Hant" typeface="新細明體"/>
+        <a:font script="Arab" typeface="Arial"/>
+        <a:font script="Hebr" typeface="Arial"/>
+        <a:font script="Thai" typeface="Cordia New"/>
+        <a:font script="Ethi" typeface="Nyala"/>
+        <a:font script="Beng" typeface="Vrinda"/>
+        <a:font script="Gujr" typeface="Shruti"/>
+        <a:font script="Khmr" typeface="DaunPenh"/>
+        <a:font script="Knda" typeface="Tunga"/>
+        <a:font script="Guru" typeface="Raavi"/>
+        <a:font script="Cans" typeface="Euphemia"/>
+        <a:font script="Cher" typeface="Plantagenet Cherokee"/>
+        <a:font script="Yiii" typeface="Microsoft Yi Baiti"/>
+        <a:font script="Tibt" typeface="Microsoft Himalaya"/>
+        <a:font script="Thaa" typeface="MV Boli"/>
+        <a:font script="Deva" typeface="Mangal"/>
+        <a:font script="Telu" typeface="Gautami"/>
+        <a:font script="Taml" typeface="Latha"/>
+        <a:font script="Syrc" typeface="Estrangelo Edessa"/>
+        <a:font script="Orya" typeface="Kalinga"/>
+        <a:font script="Mlym" typeface="Kartika"/>
+        <a:font script="Laoo" typeface="DokChampa"/>
+        <a:font script="Sinh" typeface="Iskoola Pota"/>
+        <a:font script="Mong" typeface="Mongolian Baiti"/>
+        <a:font script="Viet" typeface="Arial"/>
+        <a:font script="Uigh" typeface="Microsoft Uighur"/>
+        <a:font script="Geor" typeface="Sylfaen"/>
+        <a:font script="Armn" typeface="Arial"/>
+        <a:font script="Bugi" typeface="Leelawadee UI"/>
+        <a:font script="Bopo" typeface="Microsoft JhengHei"/>
+        <a:font script="Java" typeface="Javanese Text"/>
+        <a:font script="Lisu" typeface="Segoe UI"/>
+        <a:font script="Mymr" typeface="Myanmar Text"/>
+        <a:font script="Nkoo" typeface="Ebrima"/>
+        <a:font script="Olck" typeface="Nirmala UI"/>
+        <a:font script="Osma" typeface="Ebrima"/>
+        <a:font script="Phag" typeface="Phagspa"/>
+        <a:font script="Syrn" typeface="Estrangelo Edessa"/>
+        <a:font script="Syrj" typeface="Estrangelo Edessa"/>
+        <a:font script="Syre" typeface="Estrangelo Edessa"/>
+        <a:font script="Sora" typeface="Nirmala UI"/>
+        <a:font script="Tale" typeface="Microsoft Tai Le"/>
+        <a:font script="Talu" typeface="Microsoft New Tai Lue"/>
+        <a:font script="Tfng" typeface="Ebrima"/>
+      </a:minorFont>
+    </a:fontScheme>
+    <a:fmtScheme name="Office">
+      <a:fillStyleLst>
+        <a:solidFill>
+          <a:schemeClr val="phClr"/>
+        </a:solidFill>
+        <a:gradFill rotWithShape="1">
+          <a:gsLst>
+            <a:gs pos="0">
+              <a:schemeClr val="phClr">
+                <a:lumMod val="110000"/>
+                <a:satMod val="105000"/>
+                <a:tint val="67000"/>
+              </a:schemeClr>
+            </a:gs>
+            <a:gs pos="50000">
+              <a:schemeClr val="phClr">
+                <a:lumMod val="105000"/>
+                <a:satMod val="103000"/>
+                <a:tint val="73000"/>
+              </a:schemeClr>
+            </a:gs>
+            <a:gs pos="100000">
+              <a:schemeClr val="phClr">
+                <a:lumMod val="105000"/>
+                <a:satMod val="109000"/>
+                <a:tint val="81000"/>
+              </a:schemeClr>
+            </a:gs>
+          </a:gsLst>
+          <a:lin ang="5400000" scaled="0"/>
+        </a:gradFill>
+        <a:gradFill rotWithShape="1">
+          <a:gsLst>
+            <a:gs pos="0">
+              <a:schemeClr val="phClr">
+                <a:satMod val="103000"/>
+                <a:lumMod val="102000"/>
+                <a:tint val="94000"/>
+              </a:schemeClr>
+            </a:gs>
+            <a:gs pos="50000">
+              <a:schemeClr val="phClr">
+                <a:satMod val="110000"/>
+                <a:lumMod val="100000"/>
+                <a:shade val="100000"/>
+              </a:schemeClr>
+            </a:gs>
+            <a:gs pos="100000">
+              <a:schemeClr val="phClr">
+                <a:lumMod val="99000"/>
+                <a:satMod val="120000"/>
+                <a:shade val="78000"/>
+              </a:schemeClr>
+            </a:gs>
+          </a:gsLst>
+          <a:lin ang="5400000" scaled="0"/>
+        </a:gradFill>
+      </a:fillStyleLst>
+      <a:lnStyleLst>
+        <a:ln w="6350" cap="flat" cmpd="sng" algn="ctr">
+          <a:solidFill>
+            <a:schemeClr val="phClr"/>
+          </a:solidFill>
+          <a:prstDash val="solid"/>
+          <a:miter lim="800000"/>
+        </a:ln>
+        <a:ln w="12700" cap="flat" cmpd="sng" algn="ctr">
+          <a:solidFill>
+            <a:schemeClr val="phClr"/>
+          </a:solidFill>
+          <a:prstDash val="solid"/>
+          <a:miter lim="800000"/>
+        </a:ln>
+        <a:ln w="19050" cap="flat" cmpd="sng" algn="ctr">
+          <a:solidFill>
+            <a:schemeClr val="phClr"/>
+          </a:solidFill>
+          <a:prstDash val="solid"/>
+          <a:miter lim="800000"/>
+        </a:ln>
+      </a:lnStyleLst>
+      <a:effectStyleLst>
+        <a:effectStyle>
+          <a:effectLst/>
+        </a:effectStyle>
+        <a:effectStyle>
+          <a:effectLst/>
+        </a:effectStyle>
+        <a:effectStyle>
+          <a:effectLst>
+            <a:outerShdw blurRad="57150" dist="19050" dir="5400000" algn="ctr" rotWithShape="0">
+              <a:srgbClr val="000000">
+                <a:alpha val="63000"/>
+              </a:srgbClr>
+            </a:outerShdw>
+          </a:effectLst>
+        </a:effectStyle>
+      </a:effectStyleLst>
+      <a:bgFillStyleLst>
+        <a:solidFill>
+          <a:schemeClr val="phClr"/>
+        </a:solidFill>
+        <a:solidFill>
+          <a:schemeClr val="phClr">
+            <a:tint val="95000"/>
+            <a:satMod val="170000"/>
+          </a:schemeClr>
+        </a:solidFill>
+        <a:gradFill rotWithShape="1">
+          <a:gsLst>
+            <a:gs pos="0">
+              <a:schemeClr val="phClr">
+                <a:tint val="93000"/>
+                <a:satMod val="150000"/>
+                <a:shade val="98000"/>
+                <a:lumMod val="102000"/>
+              </a:schemeClr>
+            </a:gs>
+            <a:gs pos="50000">
+              <a:schemeClr val="phClr">
+                <a:tint val="98000"/>
+                <a:satMod val="130000"/>
+                <a:shade val="90000"/>
+                <a:lumMod val="103000"/>
+              </a:schemeClr>
+            </a:gs>
+            <a:gs pos="100000">
+              <a:schemeClr val="phClr">
+                <a:shade val="63000"/>
+                <a:satMod val="120000"/>
+              </a:schemeClr>
+            </a:gs>
+          </a:gsLst>
+          <a:lin ang="5400000" scaled="0"/>
+        </a:gradFill>
+      </a:bgFillStyleLst>
+    </a:fmtScheme>
+  </a:themeElements>
+  <a:objectDefaults/>
+  <a:extraClrSchemeLst/>
+  <a:extLst>
+    <a:ext uri="{05A4C25C-085E-4340-85A3-A5531E510DB2}">
+      <thm15:themeFamily xmlns:thm15="http://schemas.microsoft.com/office/thememl/2012/main" name="Office Theme" id="{62F939B6-93AF-4DB8-9C6B-D6C7DFDC589F}" vid="{4A3C46E8-61CC-4603-A589-7422A47A8E4A}"/>
+    </a:ext>
+  </a:extLst>
+</a:theme>
 </file>